--- a/artifacts/speaking-portfolio-expanded/decks/benchmarks-30min-handout.pptx
+++ b/artifacts/speaking-portfolio-expanded/decks/benchmarks-30min-handout.pptx
@@ -1070,7 +1070,7 @@
                 <a:ea typeface="Arial"/>
                 <a:cs typeface="Arial"/>
               </a:rPr>
-              <a:t xml:space="preserve">Cohen (1960), [A Coefficient of Agreement for Nominal Scales](https://journals.sagepub.com/doi/abs/10.1177/001316446002000104). Feinstein and Cicchetti (1990), [High agreement but low kappa](https://pubmed.ncbi.nlm.nih.gov/2348207/). [Position bias study](https://arxiv.org/abs/2406.07791); [Self-Preference Bias in LLM-as-a-Judge](https://arxiv.org/abs/2410.21819).</a:t>
+              <a:t xml:space="preserve">Cohen (1960), [A Coefficient of Agreement for Nominal Scales](https://journals.sagepub.com/doi/abs/10.1177/001316446002000104). Feinstein and Cicchetti (1990), [High agreement but low kappa](https://pubmed.ncbi.nlm.nih.gov/2348207/). Shi et al. (2024), [Judging the Judges: position bias in pairwise LLM comparisons](https://arxiv.org/abs/2406.07791). Wataoka et al. (2024), [Self-Preference Bias in LLM-as-a-Judge](https://arxiv.org/abs/2410.21819).</a:t>
             </a:r>
             <a:endParaRPr lang="en-US" sz="1200"/>
           </a:p>
@@ -2513,99 +2513,99 @@
                 <a:ea typeface="Arial"/>
                 <a:cs typeface="Arial"/>
               </a:rPr>
-              <a:t xml:space="preserve">The suite is an instrument. Test the instrument. Then use it to make a decision.</a:t>
-            </a:r>
-            <a:endParaRPr lang="en-US" sz="1200"/>
-          </a:p>
-          <a:p>
-            <a:pPr marL="0" indent="0">
-              <a:lnSpc>
-                <a:spcPts val="1560"/>
-              </a:lnSpc>
-              <a:spcAft>
-                <a:spcPts val="0"/>
-              </a:spcAft>
-              <a:buNone/>
-            </a:pPr>
-            <a:r>
-              <a:rPr lang="en-US" sz="1200" b="0">
-                <a:solidFill>
-                  <a:srgbClr val="202b33"/>
-                </a:solidFill>
-                <a:latin typeface="Arial"/>
-                <a:ea typeface="Arial"/>
-                <a:cs typeface="Arial"/>
-              </a:rPr>
-              <a:t xml:space="preserve"/>
-            </a:r>
-            <a:endParaRPr lang="en-US" sz="1200"/>
-          </a:p>
-          <a:p>
-            <a:pPr marL="0" indent="0">
-              <a:lnSpc>
-                <a:spcPts val="1560"/>
-              </a:lnSpc>
-              <a:spcAft>
-                <a:spcPts val="0"/>
-              </a:spcAft>
-              <a:buNone/>
-            </a:pPr>
-            <a:r>
-              <a:rPr lang="en-US" sz="1200" b="0">
-                <a:solidFill>
-                  <a:srgbClr val="202b33"/>
-                </a:solidFill>
-                <a:latin typeface="Arial"/>
-                <a:ea typeface="Arial"/>
-                <a:cs typeface="Arial"/>
-              </a:rPr>
-              <a:t xml:space="preserve"/>
-            </a:r>
-            <a:endParaRPr lang="en-US" sz="1200"/>
-          </a:p>
-          <a:p>
-            <a:pPr marL="0" indent="0">
-              <a:lnSpc>
-                <a:spcPts val="1560"/>
-              </a:lnSpc>
-              <a:spcAft>
-                <a:spcPts val="0"/>
-              </a:spcAft>
-              <a:buNone/>
-            </a:pPr>
-            <a:r>
-              <a:rPr lang="en-US" sz="1200" b="0">
-                <a:solidFill>
-                  <a:srgbClr val="202b33"/>
-                </a:solidFill>
-                <a:latin typeface="Arial"/>
-                <a:ea typeface="Arial"/>
-                <a:cs typeface="Arial"/>
-              </a:rPr>
-              <a:t xml:space="preserve"/>
-            </a:r>
-            <a:endParaRPr lang="en-US" sz="1200"/>
-          </a:p>
-          <a:p>
-            <a:pPr marL="0" indent="0">
-              <a:lnSpc>
-                <a:spcPts val="1560"/>
-              </a:lnSpc>
-              <a:spcAft>
-                <a:spcPts val="0"/>
-              </a:spcAft>
-              <a:buNone/>
-            </a:pPr>
-            <a:r>
-              <a:rPr lang="en-US" sz="1200" b="0">
-                <a:solidFill>
-                  <a:srgbClr val="202b33"/>
-                </a:solidFill>
-                <a:latin typeface="Arial"/>
-                <a:ea typeface="Arial"/>
-                <a:cs typeface="Arial"/>
-              </a:rPr>
-              <a:t xml:space="preserve"/>
+              <a:t xml:space="preserve">The suite is an instrument. Test the instrument.</a:t>
+            </a:r>
+            <a:endParaRPr lang="en-US" sz="1200"/>
+          </a:p>
+          <a:p>
+            <a:pPr marL="0" indent="0">
+              <a:lnSpc>
+                <a:spcPts val="1560"/>
+              </a:lnSpc>
+              <a:spcAft>
+                <a:spcPts val="0"/>
+              </a:spcAft>
+              <a:buNone/>
+            </a:pPr>
+            <a:r>
+              <a:rPr lang="en-US" sz="1200" b="0">
+                <a:solidFill>
+                  <a:srgbClr val="202b33"/>
+                </a:solidFill>
+                <a:latin typeface="Arial"/>
+                <a:ea typeface="Arial"/>
+                <a:cs typeface="Arial"/>
+              </a:rPr>
+              <a:t xml:space="preserve"/>
+            </a:r>
+            <a:endParaRPr lang="en-US" sz="1200"/>
+          </a:p>
+          <a:p>
+            <a:pPr marL="0" indent="0">
+              <a:lnSpc>
+                <a:spcPts val="1560"/>
+              </a:lnSpc>
+              <a:spcAft>
+                <a:spcPts val="0"/>
+              </a:spcAft>
+              <a:buNone/>
+            </a:pPr>
+            <a:r>
+              <a:rPr lang="en-US" sz="1200" b="0">
+                <a:solidFill>
+                  <a:srgbClr val="202b33"/>
+                </a:solidFill>
+                <a:latin typeface="Arial"/>
+                <a:ea typeface="Arial"/>
+                <a:cs typeface="Arial"/>
+              </a:rPr>
+              <a:t xml:space="preserve"/>
+            </a:r>
+            <a:endParaRPr lang="en-US" sz="1200"/>
+          </a:p>
+          <a:p>
+            <a:pPr marL="0" indent="0">
+              <a:lnSpc>
+                <a:spcPts val="1560"/>
+              </a:lnSpc>
+              <a:spcAft>
+                <a:spcPts val="0"/>
+              </a:spcAft>
+              <a:buNone/>
+            </a:pPr>
+            <a:r>
+              <a:rPr lang="en-US" sz="1200" b="0">
+                <a:solidFill>
+                  <a:srgbClr val="202b33"/>
+                </a:solidFill>
+                <a:latin typeface="Arial"/>
+                <a:ea typeface="Arial"/>
+                <a:cs typeface="Arial"/>
+              </a:rPr>
+              <a:t xml:space="preserve"/>
+            </a:r>
+            <a:endParaRPr lang="en-US" sz="1200"/>
+          </a:p>
+          <a:p>
+            <a:pPr marL="0" indent="0">
+              <a:lnSpc>
+                <a:spcPts val="1560"/>
+              </a:lnSpc>
+              <a:spcAft>
+                <a:spcPts val="0"/>
+              </a:spcAft>
+              <a:buNone/>
+            </a:pPr>
+            <a:r>
+              <a:rPr lang="en-US" sz="1200" b="0">
+                <a:solidFill>
+                  <a:srgbClr val="202b33"/>
+                </a:solidFill>
+                <a:latin typeface="Arial"/>
+                <a:ea typeface="Arial"/>
+                <a:cs typeface="Arial"/>
+              </a:rPr>
+              <a:t xml:space="preserve">Stop talking.</a:t>
             </a:r>
             <a:endParaRPr lang="en-US" sz="1200"/>
           </a:p>
@@ -2718,7 +2718,7 @@
                 <a:ea typeface="Arial"/>
                 <a:cs typeface="Arial"/>
               </a:rPr>
-              <a:t xml:space="preserve">Campbell (1979), [Assessing the impact of planned social change](https://doi.org/10.1016/0149-7189%2879%2990048-X). Strathern (1997), [Improving ratings](https://gwern.net/doc/statistics/decision/1997-strathern.pdf), European Review 5(3), 305–321. Formulations above are paraphrases.</a:t>
+              <a:t xml:space="preserve">Goodhart (1975), Problems of Monetary Management: The U.K. Experience, Reserve Bank of Australia conference paper (reprinted 1981). Campbell (1979), [Assessing the impact of planned social change](https://doi.org/10.1016/0149-7189%2879%2990048-X). Strathern (1997), [Improving ratings](https://gwern.net/doc/statistics/decision/1997-strathern.pdf), European Review 5(3), 305–321. Formulations above are attributed paraphrases, not claims that every optimized benchmark has stopped measuring anything.</a:t>
             </a:r>
             <a:endParaRPr lang="en-US" sz="1200"/>
           </a:p>
@@ -2810,7 +2810,7 @@
                 <a:ea typeface="Arial"/>
                 <a:cs typeface="Arial"/>
               </a:rPr>
-              <a:t xml:space="preserve">Dan Levy, [Auto-Tune Your LLM Judge](https://danlevy.net/auto-tune-your-llm-judge/), supplied article. The sequence is reused as a teaching fixture, not a fresh measurement.</a:t>
+              <a:t xml:space="preserve">Dan Levy, [Auto-Tune Your LLM Judge](https://danlevy.net/auto-tune-your-llm-judge/), danlevy.net, 11 August 2026. The sequence is reused as a teaching fixture, not a fresh measurement.</a:t>
             </a:r>
             <a:endParaRPr lang="en-US" sz="1200"/>
           </a:p>
@@ -2902,7 +2902,7 @@
                 <a:ea typeface="Arial"/>
                 <a:cs typeface="Arial"/>
               </a:rPr>
-              <a:t xml:space="preserve">Cohen (1960), [A Coefficient of Agreement for Nominal Scales](https://journals.sagepub.com/doi/abs/10.1177/001316446002000104). Feinstein and Cicchetti (1990), [High agreement but low kappa](https://pubmed.ncbi.nlm.nih.gov/2348207/). [Position bias study](https://arxiv.org/abs/2406.07791); [Self-Preference Bias in LLM-as-a-Judge](https://arxiv.org/abs/2410.21819).</a:t>
+              <a:t xml:space="preserve">Cohen (1960), [A Coefficient of Agreement for Nominal Scales](https://journals.sagepub.com/doi/abs/10.1177/001316446002000104). Feinstein and Cicchetti (1990), [High agreement but low kappa](https://pubmed.ncbi.nlm.nih.gov/2348207/). Shi et al. (2024), [Judging the Judges: position bias in pairwise LLM comparisons](https://arxiv.org/abs/2406.07791). Wataoka et al. (2024), [Self-Preference Bias in LLM-as-a-Judge](https://arxiv.org/abs/2410.21819).</a:t>
             </a:r>
             <a:endParaRPr lang="en-US" sz="1200"/>
           </a:p>
@@ -2969,7 +2969,7 @@
                 <a:ea typeface="Arial"/>
                 <a:cs typeface="Arial"/>
               </a:rPr>
-              <a:t xml:space="preserve">Campbell (1979), [Assessing the impact of planned social change](https://doi.org/10.1016/0149-7189%2879%2990048-X). Strathern (1997), [Improving ratings](https://gwern.net/doc/statistics/decision/1997-strathern.pdf), European Review 5(3), 305–321. Formulations above are paraphrases.</a:t>
+              <a:t xml:space="preserve">Goodhart (1975), Problems of Monetary Management: The U.K. Experience, Reserve Bank of Australia conference paper (reprinted 1981). Campbell (1979), [Assessing the impact of planned social change](https://doi.org/10.1016/0149-7189%2879%2990048-X). Strathern (1997), [Improving ratings](https://gwern.net/doc/statistics/decision/1997-strathern.pdf), European Review 5(3), 305–321. Formulations above are attributed paraphrases, not claims that every optimized benchmark has stopped measuring anything.</a:t>
             </a:r>
             <a:endParaRPr lang="en-US" sz="1200"/>
           </a:p>
@@ -3061,7 +3061,7 @@
                 <a:ea typeface="Arial"/>
                 <a:cs typeface="Arial"/>
               </a:rPr>
-              <a:t xml:space="preserve">Dan Levy, [Auto-Tune Your LLM Judge](https://danlevy.net/auto-tune-your-llm-judge/), supplied article. The sequence is reused as a teaching fixture, not a fresh measurement.</a:t>
+              <a:t xml:space="preserve">Dan Levy, [Auto-Tune Your LLM Judge](https://danlevy.net/auto-tune-your-llm-judge/), danlevy.net, 11 August 2026. The sequence is reused as a teaching fixture, not a fresh measurement.</a:t>
             </a:r>
             <a:endParaRPr lang="en-US" sz="1200"/>
           </a:p>
@@ -3153,7 +3153,7 @@
                 <a:ea typeface="Arial"/>
                 <a:cs typeface="Arial"/>
               </a:rPr>
-              <a:t xml:space="preserve">Cohen (1960), [A Coefficient of Agreement for Nominal Scales](https://journals.sagepub.com/doi/abs/10.1177/001316446002000104). Feinstein and Cicchetti (1990), [High agreement but low kappa](https://pubmed.ncbi.nlm.nih.gov/2348207/). [Position bias study](https://arxiv.org/abs/2406.07791); [Self-Preference Bias in LLM-as-a-Judge](https://arxiv.org/abs/2410.21819).</a:t>
+              <a:t xml:space="preserve">Cohen (1960), [A Coefficient of Agreement for Nominal Scales](https://journals.sagepub.com/doi/abs/10.1177/001316446002000104). Feinstein and Cicchetti (1990), [High agreement but low kappa](https://pubmed.ncbi.nlm.nih.gov/2348207/). Shi et al. (2024), [Judging the Judges: position bias in pairwise LLM comparisons](https://arxiv.org/abs/2406.07791). Wataoka et al. (2024), [Self-Preference Bias in LLM-as-a-Judge](https://arxiv.org/abs/2410.21819).</a:t>
             </a:r>
             <a:endParaRPr lang="en-US" sz="1200"/>
           </a:p>
@@ -4069,7 +4069,7 @@
                 <a:ea typeface="Arial"/>
                 <a:cs typeface="Arial"/>
               </a:rPr>
-              <a:t xml:space="preserve">Prices can help choose among acceptable systems. They cannot tell us which systems are acceptable. The cost-per-success arithmetic belongs to Cry Me a Free Tier. Today the question is whether this score means anything.</a:t>
+              <a:t xml:space="preserve">Prices can help choose among acceptable systems. They cannot tell us which systems are acceptable. The cost-per-success arithmetic belongs to Buy Me a Free Tier. Today the question is whether this score means anything.</a:t>
             </a:r>
             <a:endParaRPr lang="en-US" sz="1200"/>
           </a:p>
@@ -4596,7 +4596,7 @@
                 <a:ea typeface="Arial"/>
                 <a:cs typeface="Arial"/>
               </a:rPr>
-              <a:t xml:space="preserve">Campbell (1979), [Assessing the impact of planned social change](https://doi.org/10.1016/0149-7189%2879%2990048-X). Strathern (1997), [Improving ratings](https://gwern.net/doc/statistics/decision/1997-strathern.pdf), European Review 5(3), 305–321. Formulations above are paraphrases.</a:t>
+              <a:t xml:space="preserve">Goodhart (1975), Problems of Monetary Management: The U.K. Experience, Reserve Bank of Australia conference paper (reprinted 1981). Campbell (1979), [Assessing the impact of planned social change](https://doi.org/10.1016/0149-7189%2879%2990048-X). Strathern (1997), [Improving ratings](https://gwern.net/doc/statistics/decision/1997-strathern.pdf), European Review 5(3), 305–321. Formulations above are attributed paraphrases, not claims that every optimized benchmark has stopped measuring anything.</a:t>
             </a:r>
             <a:endParaRPr lang="en-US" sz="1200"/>
           </a:p>
@@ -6658,7 +6658,7 @@
                 <a:ea typeface="Arial"/>
                 <a:cs typeface="Arial"/>
               </a:rPr>
-              <a:t xml:space="preserve">Dan Levy, [Auto-Tune Your LLM Judge](https://danlevy.net/auto-tune-your-llm-judge/), supplied article. The sequence is reused as a teaching fixture, not a fresh measurement.</a:t>
+              <a:t xml:space="preserve">Dan Levy, [Auto-Tune Your LLM Judge](https://danlevy.net/auto-tune-your-llm-judge/), danlevy.net, 11 August 2026. The sequence is reused as a teaching fixture, not a fresh measurement.</a:t>
             </a:r>
             <a:endParaRPr lang="en-US" sz="1200"/>
           </a:p>
@@ -7929,7 +7929,7 @@
                 <a:ea typeface="Arial"/>
                 <a:cs typeface="Arial"/>
               </a:rPr>
-              <a:t xml:space="preserve">Twenty green cases. About one in seven. (continued)</a:t>
+              <a:t xml:space="preserve">Twenty for Twenty, One in Seven (continued)</a:t>
             </a:r>
             <a:endParaRPr lang="en-US" sz="2550"/>
           </a:p>
@@ -8302,7 +8302,7 @@
                 <a:ea typeface="Arial"/>
                 <a:cs typeface="Arial"/>
               </a:rPr>
-              <a:t xml:space="preserve">Your grader is an instrument too</a:t>
+              <a:t xml:space="preserve">Agreeable to a Fault (κ = 0)</a:t>
             </a:r>
             <a:endParaRPr lang="en-US" sz="2550"/>
           </a:p>
@@ -10014,7 +10014,7 @@
                 <a:ea typeface="Arial"/>
                 <a:cs typeface="Arial"/>
               </a:rPr>
-              <a:t xml:space="preserve">Make it a release gate</a:t>
+              <a:t xml:space="preserve">Write the Rejection Rule First</a:t>
             </a:r>
             <a:endParaRPr lang="en-US" sz="2550"/>
           </a:p>
@@ -11451,7 +11451,7 @@
                 <a:ea typeface="Arial"/>
                 <a:cs typeface="Arial"/>
               </a:rPr>
-              <a:t xml:space="preserve">instrument. Then use it to make a decision.</a:t>
+              <a:t xml:space="preserve">instrument.</a:t>
             </a:r>
             <a:endParaRPr lang="en-US" sz="1500"/>
           </a:p>
@@ -11729,30 +11729,122 @@
                 <a:ea typeface="Arial"/>
                 <a:cs typeface="Arial"/>
               </a:rPr>
-              <a:t xml:space="preserve">Campbell (1979), Assessing the impact of</a:t>
-            </a:r>
-            <a:endParaRPr lang="en-US" sz="1500"/>
-          </a:p>
-          <a:p>
-            <a:pPr marL="0" indent="0">
-              <a:lnSpc>
-                <a:spcPts val="1950"/>
-              </a:lnSpc>
-              <a:spcAft>
-                <a:spcPts val="0"/>
-              </a:spcAft>
-              <a:buNone/>
-            </a:pPr>
-            <a:r>
-              <a:rPr lang="en-US" sz="1500" b="0">
-                <a:solidFill>
-                  <a:srgbClr val="202B33"/>
-                </a:solidFill>
-                <a:latin typeface="Arial"/>
-                <a:ea typeface="Arial"/>
-                <a:cs typeface="Arial"/>
-              </a:rPr>
-              <a:t xml:space="preserve">planned social change —</a:t>
+              <a:t xml:space="preserve">Goodhart (1975), Problems of Monetary</a:t>
+            </a:r>
+            <a:endParaRPr lang="en-US" sz="1500"/>
+          </a:p>
+          <a:p>
+            <a:pPr marL="0" indent="0">
+              <a:lnSpc>
+                <a:spcPts val="1950"/>
+              </a:lnSpc>
+              <a:spcAft>
+                <a:spcPts val="0"/>
+              </a:spcAft>
+              <a:buNone/>
+            </a:pPr>
+            <a:r>
+              <a:rPr lang="en-US" sz="1500" b="0">
+                <a:solidFill>
+                  <a:srgbClr val="202B33"/>
+                </a:solidFill>
+                <a:latin typeface="Arial"/>
+                <a:ea typeface="Arial"/>
+                <a:cs typeface="Arial"/>
+              </a:rPr>
+              <a:t xml:space="preserve">Management: The U.K. Experience, Reserve</a:t>
+            </a:r>
+            <a:endParaRPr lang="en-US" sz="1500"/>
+          </a:p>
+          <a:p>
+            <a:pPr marL="0" indent="0">
+              <a:lnSpc>
+                <a:spcPts val="1950"/>
+              </a:lnSpc>
+              <a:spcAft>
+                <a:spcPts val="0"/>
+              </a:spcAft>
+              <a:buNone/>
+            </a:pPr>
+            <a:r>
+              <a:rPr lang="en-US" sz="1500" b="0">
+                <a:solidFill>
+                  <a:srgbClr val="202B33"/>
+                </a:solidFill>
+                <a:latin typeface="Arial"/>
+                <a:ea typeface="Arial"/>
+                <a:cs typeface="Arial"/>
+              </a:rPr>
+              <a:t xml:space="preserve">Bank of Australia conference paper</a:t>
+            </a:r>
+            <a:endParaRPr lang="en-US" sz="1500"/>
+          </a:p>
+          <a:p>
+            <a:pPr marL="0" indent="0">
+              <a:lnSpc>
+                <a:spcPts val="1950"/>
+              </a:lnSpc>
+              <a:spcAft>
+                <a:spcPts val="0"/>
+              </a:spcAft>
+              <a:buNone/>
+            </a:pPr>
+            <a:r>
+              <a:rPr lang="en-US" sz="1500" b="0">
+                <a:solidFill>
+                  <a:srgbClr val="202B33"/>
+                </a:solidFill>
+                <a:latin typeface="Arial"/>
+                <a:ea typeface="Arial"/>
+                <a:cs typeface="Arial"/>
+              </a:rPr>
+              <a:t xml:space="preserve">(reprinted 1981). Campbell (1979),</a:t>
+            </a:r>
+            <a:endParaRPr lang="en-US" sz="1500"/>
+          </a:p>
+          <a:p>
+            <a:pPr marL="0" indent="0">
+              <a:lnSpc>
+                <a:spcPts val="1950"/>
+              </a:lnSpc>
+              <a:spcAft>
+                <a:spcPts val="0"/>
+              </a:spcAft>
+              <a:buNone/>
+            </a:pPr>
+            <a:r>
+              <a:rPr lang="en-US" sz="1500" b="0">
+                <a:solidFill>
+                  <a:srgbClr val="202B33"/>
+                </a:solidFill>
+                <a:latin typeface="Arial"/>
+                <a:ea typeface="Arial"/>
+                <a:cs typeface="Arial"/>
+              </a:rPr>
+              <a:t xml:space="preserve">Assessing the impact of planned social</a:t>
+            </a:r>
+            <a:endParaRPr lang="en-US" sz="1500"/>
+          </a:p>
+          <a:p>
+            <a:pPr marL="0" indent="0">
+              <a:lnSpc>
+                <a:spcPts val="1950"/>
+              </a:lnSpc>
+              <a:spcAft>
+                <a:spcPts val="0"/>
+              </a:spcAft>
+              <a:buNone/>
+            </a:pPr>
+            <a:r>
+              <a:rPr lang="en-US" sz="1500" b="0">
+                <a:solidFill>
+                  <a:srgbClr val="202B33"/>
+                </a:solidFill>
+                <a:latin typeface="Arial"/>
+                <a:ea typeface="Arial"/>
+                <a:cs typeface="Arial"/>
+              </a:rPr>
+              <a:t xml:space="preserve">change —</a:t>
             </a:r>
             <a:endParaRPr lang="en-US" sz="1500"/>
           </a:p>
@@ -11867,7 +11959,53 @@
                 <a:ea typeface="Arial"/>
                 <a:cs typeface="Arial"/>
               </a:rPr>
-              <a:t xml:space="preserve">above are paraphrases.</a:t>
+              <a:t xml:space="preserve">above are attributed paraphrases, not</a:t>
+            </a:r>
+            <a:endParaRPr lang="en-US" sz="1500"/>
+          </a:p>
+          <a:p>
+            <a:pPr marL="0" indent="0">
+              <a:lnSpc>
+                <a:spcPts val="1950"/>
+              </a:lnSpc>
+              <a:spcAft>
+                <a:spcPts val="0"/>
+              </a:spcAft>
+              <a:buNone/>
+            </a:pPr>
+            <a:r>
+              <a:rPr lang="en-US" sz="1500" b="0">
+                <a:solidFill>
+                  <a:srgbClr val="202B33"/>
+                </a:solidFill>
+                <a:latin typeface="Arial"/>
+                <a:ea typeface="Arial"/>
+                <a:cs typeface="Arial"/>
+              </a:rPr>
+              <a:t xml:space="preserve">claims that every optimized benchmark has</a:t>
+            </a:r>
+            <a:endParaRPr lang="en-US" sz="1500"/>
+          </a:p>
+          <a:p>
+            <a:pPr marL="0" indent="0">
+              <a:lnSpc>
+                <a:spcPts val="1950"/>
+              </a:lnSpc>
+              <a:spcAft>
+                <a:spcPts val="0"/>
+              </a:spcAft>
+              <a:buNone/>
+            </a:pPr>
+            <a:r>
+              <a:rPr lang="en-US" sz="1500" b="0">
+                <a:solidFill>
+                  <a:srgbClr val="202B33"/>
+                </a:solidFill>
+                <a:latin typeface="Arial"/>
+                <a:ea typeface="Arial"/>
+                <a:cs typeface="Arial"/>
+              </a:rPr>
+              <a:t xml:space="preserve">stopped measuring anything.</a:t>
             </a:r>
             <a:endParaRPr lang="en-US" sz="1500"/>
           </a:p>
@@ -12006,75 +12144,6 @@
                 <a:cs typeface="Arial"/>
               </a:rPr>
               <a:t xml:space="preserve">Interpretation and</a:t>
-            </a:r>
-            <a:endParaRPr lang="en-US" sz="1500"/>
-          </a:p>
-          <a:p>
-            <a:pPr marL="0" indent="0">
-              <a:lnSpc>
-                <a:spcPts val="1950"/>
-              </a:lnSpc>
-              <a:spcAft>
-                <a:spcPts val="0"/>
-              </a:spcAft>
-              <a:buNone/>
-            </a:pPr>
-            <a:r>
-              <a:rPr lang="en-US" sz="1500" b="0">
-                <a:solidFill>
-                  <a:srgbClr val="202B33"/>
-                </a:solidFill>
-                <a:latin typeface="Arial"/>
-                <a:ea typeface="Arial"/>
-                <a:cs typeface="Arial"/>
-              </a:rPr>
-              <a:t xml:space="preserve">Use](https://www.ets.org/research/policy_research_reports/publications/report/1990/ihmy.html).</a:t>
-            </a:r>
-            <a:endParaRPr lang="en-US" sz="1500"/>
-          </a:p>
-          <a:p>
-            <a:pPr marL="0" indent="0">
-              <a:lnSpc>
-                <a:spcPts val="1950"/>
-              </a:lnSpc>
-              <a:spcAft>
-                <a:spcPts val="0"/>
-              </a:spcAft>
-              <a:buNone/>
-            </a:pPr>
-            <a:r>
-              <a:rPr lang="en-US" sz="1500" b="0">
-                <a:solidFill>
-                  <a:srgbClr val="202B33"/>
-                </a:solidFill>
-                <a:latin typeface="Arial"/>
-                <a:ea typeface="Arial"/>
-                <a:cs typeface="Arial"/>
-              </a:rPr>
-              <a:t xml:space="preserve">Raji et al. (2021), [AI and the Everything</a:t>
-            </a:r>
-            <a:endParaRPr lang="en-US" sz="1500"/>
-          </a:p>
-          <a:p>
-            <a:pPr marL="0" indent="0">
-              <a:lnSpc>
-                <a:spcPts val="1950"/>
-              </a:lnSpc>
-              <a:spcAft>
-                <a:spcPts val="0"/>
-              </a:spcAft>
-              <a:buNone/>
-            </a:pPr>
-            <a:r>
-              <a:rPr lang="en-US" sz="1500" b="0">
-                <a:solidFill>
-                  <a:srgbClr val="202B33"/>
-                </a:solidFill>
-                <a:latin typeface="Arial"/>
-                <a:ea typeface="Arial"/>
-                <a:cs typeface="Arial"/>
-              </a:rPr>
-              <a:t xml:space="preserve">in the Whole Wide World</a:t>
             </a:r>
             <a:endParaRPr lang="en-US" sz="1500"/>
           </a:p>
@@ -12123,6 +12192,75 @@
                 <a:ea typeface="Arial"/>
                 <a:cs typeface="Arial"/>
               </a:rPr>
+              <a:t xml:space="preserve">Use](https://www.ets.org/research/policy_research_reports/publications/report/1990/ihmy.html).</a:t>
+            </a:r>
+            <a:endParaRPr lang="en-US" sz="1500"/>
+          </a:p>
+          <a:p>
+            <a:pPr marL="0" indent="0">
+              <a:lnSpc>
+                <a:spcPts val="1950"/>
+              </a:lnSpc>
+              <a:spcAft>
+                <a:spcPts val="0"/>
+              </a:spcAft>
+              <a:buNone/>
+            </a:pPr>
+            <a:r>
+              <a:rPr lang="en-US" sz="1500" b="0">
+                <a:solidFill>
+                  <a:srgbClr val="202B33"/>
+                </a:solidFill>
+                <a:latin typeface="Arial"/>
+                <a:ea typeface="Arial"/>
+                <a:cs typeface="Arial"/>
+              </a:rPr>
+              <a:t xml:space="preserve">Raji et al. (2021), [AI and the Everything</a:t>
+            </a:r>
+            <a:endParaRPr lang="en-US" sz="1500"/>
+          </a:p>
+          <a:p>
+            <a:pPr marL="0" indent="0">
+              <a:lnSpc>
+                <a:spcPts val="1950"/>
+              </a:lnSpc>
+              <a:spcAft>
+                <a:spcPts val="0"/>
+              </a:spcAft>
+              <a:buNone/>
+            </a:pPr>
+            <a:r>
+              <a:rPr lang="en-US" sz="1500" b="0">
+                <a:solidFill>
+                  <a:srgbClr val="202B33"/>
+                </a:solidFill>
+                <a:latin typeface="Arial"/>
+                <a:ea typeface="Arial"/>
+                <a:cs typeface="Arial"/>
+              </a:rPr>
+              <a:t xml:space="preserve">in the Whole Wide World</a:t>
+            </a:r>
+            <a:endParaRPr lang="en-US" sz="1500"/>
+          </a:p>
+          <a:p>
+            <a:pPr marL="0" indent="0">
+              <a:lnSpc>
+                <a:spcPts val="1950"/>
+              </a:lnSpc>
+              <a:spcAft>
+                <a:spcPts val="0"/>
+              </a:spcAft>
+              <a:buNone/>
+            </a:pPr>
+            <a:r>
+              <a:rPr lang="en-US" sz="1500" b="0">
+                <a:solidFill>
+                  <a:srgbClr val="202B33"/>
+                </a:solidFill>
+                <a:latin typeface="Arial"/>
+                <a:ea typeface="Arial"/>
+                <a:cs typeface="Arial"/>
+              </a:rPr>
               <a:t xml:space="preserve">Benchmark](https://datasets-benchmarks-proceedings.neurips.cc/paper/2021/hash/084b6fbb10729ed4da8c3d3f5a3ae7c9-Abstract-round2.html.</a:t>
             </a:r>
             <a:endParaRPr lang="en-US" sz="1500"/>
@@ -12215,53 +12353,53 @@
                 <a:ea typeface="Arial"/>
                 <a:cs typeface="Arial"/>
               </a:rPr>
-              <a:t xml:space="preserve">supplied article. The sequence is reused as</a:t>
-            </a:r>
-            <a:endParaRPr lang="en-US" sz="1500"/>
-          </a:p>
-          <a:p>
-            <a:pPr marL="0" indent="0">
-              <a:lnSpc>
-                <a:spcPts val="1950"/>
-              </a:lnSpc>
-              <a:spcAft>
-                <a:spcPts val="0"/>
-              </a:spcAft>
-              <a:buNone/>
-            </a:pPr>
-            <a:r>
-              <a:rPr lang="en-US" sz="1500" b="0">
-                <a:solidFill>
-                  <a:srgbClr val="202B33"/>
-                </a:solidFill>
-                <a:latin typeface="Arial"/>
-                <a:ea typeface="Arial"/>
-                <a:cs typeface="Arial"/>
-              </a:rPr>
-              <a:t xml:space="preserve">a teaching fixture, not a fresh</a:t>
-            </a:r>
-            <a:endParaRPr lang="en-US" sz="1500"/>
-          </a:p>
-          <a:p>
-            <a:pPr marL="0" indent="0">
-              <a:lnSpc>
-                <a:spcPts val="1950"/>
-              </a:lnSpc>
-              <a:spcAft>
-                <a:spcPts val="0"/>
-              </a:spcAft>
-              <a:buNone/>
-            </a:pPr>
-            <a:r>
-              <a:rPr lang="en-US" sz="1500" b="0">
-                <a:solidFill>
-                  <a:srgbClr val="202B33"/>
-                </a:solidFill>
-                <a:latin typeface="Arial"/>
-                <a:ea typeface="Arial"/>
-                <a:cs typeface="Arial"/>
-              </a:rPr>
-              <a:t xml:space="preserve">measurement.</a:t>
+              <a:t xml:space="preserve">danlevy.net, 11 August 2026. The sequence</a:t>
+            </a:r>
+            <a:endParaRPr lang="en-US" sz="1500"/>
+          </a:p>
+          <a:p>
+            <a:pPr marL="0" indent="0">
+              <a:lnSpc>
+                <a:spcPts val="1950"/>
+              </a:lnSpc>
+              <a:spcAft>
+                <a:spcPts val="0"/>
+              </a:spcAft>
+              <a:buNone/>
+            </a:pPr>
+            <a:r>
+              <a:rPr lang="en-US" sz="1500" b="0">
+                <a:solidFill>
+                  <a:srgbClr val="202B33"/>
+                </a:solidFill>
+                <a:latin typeface="Arial"/>
+                <a:ea typeface="Arial"/>
+                <a:cs typeface="Arial"/>
+              </a:rPr>
+              <a:t xml:space="preserve">is reused as a teaching fixture, not a</a:t>
+            </a:r>
+            <a:endParaRPr lang="en-US" sz="1500"/>
+          </a:p>
+          <a:p>
+            <a:pPr marL="0" indent="0">
+              <a:lnSpc>
+                <a:spcPts val="1950"/>
+              </a:lnSpc>
+              <a:spcAft>
+                <a:spcPts val="0"/>
+              </a:spcAft>
+              <a:buNone/>
+            </a:pPr>
+            <a:r>
+              <a:rPr lang="en-US" sz="1500" b="0">
+                <a:solidFill>
+                  <a:srgbClr val="202B33"/>
+                </a:solidFill>
+                <a:latin typeface="Arial"/>
+                <a:ea typeface="Arial"/>
+                <a:cs typeface="Arial"/>
+              </a:rPr>
+              <a:t xml:space="preserve">fresh measurement.</a:t>
             </a:r>
             <a:endParaRPr lang="en-US" sz="1500"/>
           </a:p>
@@ -12842,6 +12980,29 @@
             </a:r>
             <a:endParaRPr lang="en-US" sz="1500"/>
           </a:p>
+          <a:p>
+            <a:pPr marL="0" indent="0">
+              <a:lnSpc>
+                <a:spcPts val="1950"/>
+              </a:lnSpc>
+              <a:spcAft>
+                <a:spcPts val="0"/>
+              </a:spcAft>
+              <a:buNone/>
+            </a:pPr>
+            <a:r>
+              <a:rPr lang="en-US" sz="1500" b="0">
+                <a:solidFill>
+                  <a:srgbClr val="202B33"/>
+                </a:solidFill>
+                <a:latin typeface="Arial"/>
+                <a:ea typeface="Arial"/>
+                <a:cs typeface="Arial"/>
+              </a:rPr>
+              <a:t xml:space="preserve">kappa](https://pubmed.ncbi.nlm.nih.gov/2348207/).</a:t>
+            </a:r>
+            <a:endParaRPr lang="en-US" sz="1500"/>
+          </a:p>
         </p:txBody>
       </p:sp>
       <p:sp>
@@ -12887,76 +13048,99 @@
                 <a:ea typeface="Arial"/>
                 <a:cs typeface="Arial"/>
               </a:rPr>
-              <a:t xml:space="preserve">kappa](https://pubmed.ncbi.nlm.nih.gov/2348207/).</a:t>
-            </a:r>
-            <a:endParaRPr lang="en-US" sz="1500"/>
-          </a:p>
-          <a:p>
-            <a:pPr marL="0" indent="0">
-              <a:lnSpc>
-                <a:spcPts val="1950"/>
-              </a:lnSpc>
-              <a:spcAft>
-                <a:spcPts val="0"/>
-              </a:spcAft>
-              <a:buNone/>
-            </a:pPr>
-            <a:r>
-              <a:rPr lang="en-US" sz="1500" b="0">
-                <a:solidFill>
-                  <a:srgbClr val="202B33"/>
-                </a:solidFill>
-                <a:latin typeface="Arial"/>
-                <a:ea typeface="Arial"/>
-                <a:cs typeface="Arial"/>
-              </a:rPr>
-              <a:t xml:space="preserve">[Position bias</a:t>
-            </a:r>
-            <a:endParaRPr lang="en-US" sz="1500"/>
-          </a:p>
-          <a:p>
-            <a:pPr marL="0" indent="0">
-              <a:lnSpc>
-                <a:spcPts val="1950"/>
-              </a:lnSpc>
-              <a:spcAft>
-                <a:spcPts val="0"/>
-              </a:spcAft>
-              <a:buNone/>
-            </a:pPr>
-            <a:r>
-              <a:rPr lang="en-US" sz="1500" b="0">
-                <a:solidFill>
-                  <a:srgbClr val="202B33"/>
-                </a:solidFill>
-                <a:latin typeface="Arial"/>
-                <a:ea typeface="Arial"/>
-                <a:cs typeface="Arial"/>
-              </a:rPr>
-              <a:t xml:space="preserve">study](https://arxiv.org/abs/2406.07791);</a:t>
-            </a:r>
-            <a:endParaRPr lang="en-US" sz="1500"/>
-          </a:p>
-          <a:p>
-            <a:pPr marL="0" indent="0">
-              <a:lnSpc>
-                <a:spcPts val="1950"/>
-              </a:lnSpc>
-              <a:spcAft>
-                <a:spcPts val="0"/>
-              </a:spcAft>
-              <a:buNone/>
-            </a:pPr>
-            <a:r>
-              <a:rPr lang="en-US" sz="1500" b="0">
-                <a:solidFill>
-                  <a:srgbClr val="202B33"/>
-                </a:solidFill>
-                <a:latin typeface="Arial"/>
-                <a:ea typeface="Arial"/>
-                <a:cs typeface="Arial"/>
-              </a:rPr>
-              <a:t xml:space="preserve">[Self-Preference Bias in</a:t>
+              <a:t xml:space="preserve">Shi et al. (2024), [Judging the Judges:</a:t>
+            </a:r>
+            <a:endParaRPr lang="en-US" sz="1500"/>
+          </a:p>
+          <a:p>
+            <a:pPr marL="0" indent="0">
+              <a:lnSpc>
+                <a:spcPts val="1950"/>
+              </a:lnSpc>
+              <a:spcAft>
+                <a:spcPts val="0"/>
+              </a:spcAft>
+              <a:buNone/>
+            </a:pPr>
+            <a:r>
+              <a:rPr lang="en-US" sz="1500" b="0">
+                <a:solidFill>
+                  <a:srgbClr val="202B33"/>
+                </a:solidFill>
+                <a:latin typeface="Arial"/>
+                <a:ea typeface="Arial"/>
+                <a:cs typeface="Arial"/>
+              </a:rPr>
+              <a:t xml:space="preserve">position bias in pairwise LLM</a:t>
+            </a:r>
+            <a:endParaRPr lang="en-US" sz="1500"/>
+          </a:p>
+          <a:p>
+            <a:pPr marL="0" indent="0">
+              <a:lnSpc>
+                <a:spcPts val="1950"/>
+              </a:lnSpc>
+              <a:spcAft>
+                <a:spcPts val="0"/>
+              </a:spcAft>
+              <a:buNone/>
+            </a:pPr>
+            <a:r>
+              <a:rPr lang="en-US" sz="1500" b="0">
+                <a:solidFill>
+                  <a:srgbClr val="202B33"/>
+                </a:solidFill>
+                <a:latin typeface="Arial"/>
+                <a:ea typeface="Arial"/>
+                <a:cs typeface="Arial"/>
+              </a:rPr>
+              <a:t xml:space="preserve">comparisons](https://arxiv.org/abs/2406.07791).</a:t>
+            </a:r>
+            <a:endParaRPr lang="en-US" sz="1500"/>
+          </a:p>
+          <a:p>
+            <a:pPr marL="0" indent="0">
+              <a:lnSpc>
+                <a:spcPts val="1950"/>
+              </a:lnSpc>
+              <a:spcAft>
+                <a:spcPts val="0"/>
+              </a:spcAft>
+              <a:buNone/>
+            </a:pPr>
+            <a:r>
+              <a:rPr lang="en-US" sz="1500" b="0">
+                <a:solidFill>
+                  <a:srgbClr val="202B33"/>
+                </a:solidFill>
+                <a:latin typeface="Arial"/>
+                <a:ea typeface="Arial"/>
+                <a:cs typeface="Arial"/>
+              </a:rPr>
+              <a:t xml:space="preserve">Wataoka et al. (2024), [Self-Preference</a:t>
+            </a:r>
+            <a:endParaRPr lang="en-US" sz="1500"/>
+          </a:p>
+          <a:p>
+            <a:pPr marL="0" indent="0">
+              <a:lnSpc>
+                <a:spcPts val="1950"/>
+              </a:lnSpc>
+              <a:spcAft>
+                <a:spcPts val="0"/>
+              </a:spcAft>
+              <a:buNone/>
+            </a:pPr>
+            <a:r>
+              <a:rPr lang="en-US" sz="1500" b="0">
+                <a:solidFill>
+                  <a:srgbClr val="202B33"/>
+                </a:solidFill>
+                <a:latin typeface="Arial"/>
+                <a:ea typeface="Arial"/>
+                <a:cs typeface="Arial"/>
+              </a:rPr>
+              <a:t xml:space="preserve">Bias in</a:t>
             </a:r>
             <a:endParaRPr lang="en-US" sz="1500"/>
           </a:p>
@@ -13208,7 +13392,7 @@
                 <a:ea typeface="Arial"/>
                 <a:cs typeface="Arial"/>
               </a:rPr>
-              <a:t xml:space="preserve">A leaderboard, and the question it isn't answering</a:t>
+              <a:t xml:space="preserve">Tuxedo of Benchmarks</a:t>
             </a:r>
             <a:endParaRPr lang="en-US" sz="2550"/>
           </a:p>
@@ -14576,7 +14760,7 @@
                 <a:ea typeface="Arial"/>
                 <a:cs typeface="Arial"/>
               </a:rPr>
-              <a:t xml:space="preserve">arithmetic belongs to Cry Me a Free Tier.</a:t>
+              <a:t xml:space="preserve">arithmetic belongs to Buy Me a Free Tier.</a:t>
             </a:r>
             <a:endParaRPr lang="en-US" sz="1500"/>
           </a:p>
@@ -15753,7 +15937,7 @@
                 <a:ea typeface="Arial"/>
                 <a:cs typeface="Arial"/>
               </a:rPr>
-              <a:t xml:space="preserve">Your eval suite is a measuring instrument</a:t>
+              <a:t xml:space="preserve">Your Eval Suite Needs Therapy</a:t>
             </a:r>
             <a:endParaRPr lang="en-US" sz="2550"/>
           </a:p>
@@ -18321,7 +18505,7 @@
                 <a:ea typeface="Arial"/>
                 <a:cs typeface="Arial"/>
               </a:rPr>
-              <a:t xml:space="preserve">Run it five times</a:t>
+              <a:t xml:space="preserve">Run the Judges</a:t>
             </a:r>
             <a:endParaRPr lang="en-US" sz="2550"/>
           </a:p>
@@ -19246,7 +19430,7 @@
                 <a:ea typeface="Arial"/>
                 <a:cs typeface="Arial"/>
               </a:rPr>
-              <a:t xml:space="preserve">Twenty green cases. About one in seven.</a:t>
+              <a:t xml:space="preserve">Twenty for Twenty, One in Seven</a:t>
             </a:r>
             <a:endParaRPr lang="en-US" sz="2550"/>
           </a:p>
@@ -19276,7 +19460,7 @@
       </p:sp>
       <p:pic>
         <p:nvPicPr>
-          <p:cNvPr id="5" name="5d9d88671737e342604a8bb2f8a50f9753e84270f97998346745671bda4153b9" descr="Twenty green cases. About one in seven."/>
+          <p:cNvPr id="5" name="5d9d88671737e342604a8bb2f8a50f9753e84270f97998346745671bda4153b9" descr="Twenty for Twenty, One in Seven"/>
           <p:cNvPicPr>
             <a:picLocks noChangeAspect="1"/>
           </p:cNvPicPr>
